--- a/dist/초6/수학/원과자료/초6_수학_원과자료_03_띠그래프와원그래프.pptx
+++ b/dist/초6/수학/원과자료/초6_수학_원과자료_03_띠그래프와원그래프.pptx
@@ -120,13 +120,13 @@
   <p:extLst>
     <p:ext uri="{521415D9-36F7-43E2-AB2F-B90AF26B5E84}">
       <p14:sectionLst xmlns:p14="http://schemas.microsoft.com/office/powerpoint/2010/main">
-        <p14:section name="도입" id="{18a01186-8f38-78cd-457c-2193921c48f7}">
+        <p14:section name="도입" id="{046da6e5-27bd-5fa4-e2fd-b6af8f6f7f74}">
           <p14:sldIdLst>
             <p14:sldId id="256"/>
             <p14:sldId id="257"/>
           </p14:sldIdLst>
         </p14:section>
-        <p14:section name="개념" id="{a78377f2-1a59-46f8-25ad-54bf05ba00f8}">
+        <p14:section name="개념" id="{f00bbb11-842e-2548-c435-aed95d8618f1}">
           <p14:sldIdLst>
             <p14:sldId id="258"/>
             <p14:sldId id="259"/>
@@ -134,32 +134,32 @@
             <p14:sldId id="263"/>
           </p14:sldIdLst>
         </p14:section>
-        <p14:section name="연습" id="{157201e3-6d69-0405-4cf4-cd2e0a02230d}">
+        <p14:section name="연습" id="{6ba1289e-85e9-07db-6bc3-774819b1cda4}">
           <p14:sldIdLst>
             <p14:sldId id="260"/>
             <p14:sldId id="261"/>
             <p14:sldId id="264"/>
           </p14:sldIdLst>
         </p14:section>
-        <p14:section name="개념" id="{1d96a671-004a-8daf-d989-a9e89f846d8e}">
+        <p14:section name="개념" id="{d3928663-960f-2ff8-867b-ccca3562b02d}">
           <p14:sldIdLst/>
         </p14:section>
-        <p14:section name="연습" id="{43e23c90-47d8-6138-784a-ecba4670cfe3}">
+        <p14:section name="연습" id="{1e542572-8acb-2d31-2478-2b7bf02ebd0c}">
           <p14:sldIdLst/>
         </p14:section>
-        <p14:section name="확인" id="{10902526-64df-c867-c465-071ed883575a}">
+        <p14:section name="확인" id="{cd802a3f-4699-0b83-44fb-fbdfb34612c5}">
           <p14:sldIdLst>
             <p14:sldId id="265"/>
             <p14:sldId id="266"/>
             <p14:sldId id="267"/>
           </p14:sldIdLst>
         </p14:section>
-        <p14:section name="정리" id="{f26b3ebe-6d8e-1d81-e413-8551cd58fd5b}">
+        <p14:section name="정리" id="{e1af6e6a-57bc-8b28-9e2d-69daf2db95e6}">
           <p14:sldIdLst>
             <p14:sldId id="268"/>
           </p14:sldIdLst>
         </p14:section>
-        <p14:section name="보충" id="{e51dba7a-fc1e-03a2-bc4f-94aaa740ba41}">
+        <p14:section name="보충" id="{46cbc7ff-16d5-05b9-ecda-c1945a0eb212}">
           <p14:sldIdLst>
             <p14:sldId id="269"/>
           </p14:sldIdLst>
@@ -8415,8 +8415,8 @@
         </p:nvSpPr>
         <p:spPr>
           <a:xfrm>
-            <a:off x="9250639" y="3237797"/>
-            <a:ext cx="562356" cy="349250"/>
+            <a:off x="9155643" y="3237797"/>
+            <a:ext cx="752348" cy="349250"/>
           </a:xfrm>
           <a:prstGeom prst="rect">
             <a:avLst/>
@@ -8912,8 +8912,8 @@
         </p:nvSpPr>
         <p:spPr>
           <a:xfrm>
-            <a:off x="9250639" y="4862195"/>
-            <a:ext cx="562356" cy="349250"/>
+            <a:off x="9155643" y="4862195"/>
+            <a:ext cx="752348" cy="349250"/>
           </a:xfrm>
           <a:prstGeom prst="rect">
             <a:avLst/>
@@ -12427,8 +12427,8 @@
         </p:nvSpPr>
         <p:spPr>
           <a:xfrm>
-            <a:off x="10636758" y="4410837"/>
-            <a:ext cx="562356" cy="349250"/>
+            <a:off x="10541762" y="4410837"/>
+            <a:ext cx="752348" cy="349250"/>
           </a:xfrm>
           <a:prstGeom prst="rect">
             <a:avLst/>
@@ -15932,8 +15932,8 @@
         </p:nvSpPr>
         <p:spPr>
           <a:xfrm>
-            <a:off x="10286416" y="4100195"/>
-            <a:ext cx="562356" cy="349250"/>
+            <a:off x="10191420" y="4100195"/>
+            <a:ext cx="752348" cy="349250"/>
           </a:xfrm>
           <a:prstGeom prst="rect">
             <a:avLst/>
@@ -17686,8 +17686,8 @@
         </p:nvSpPr>
         <p:spPr>
           <a:xfrm>
-            <a:off x="9667061" y="3112643"/>
-            <a:ext cx="562356" cy="349250"/>
+            <a:off x="9572065" y="3112643"/>
+            <a:ext cx="752348" cy="349250"/>
           </a:xfrm>
           <a:prstGeom prst="rect">
             <a:avLst/>
